--- a/presentation_w1/FitMeet_Presentation.pptx
+++ b/presentation_w1/FitMeet_Presentation.pptx
@@ -7342,7 +7342,7 @@
                 <a:ea typeface="Calibri" pitchFamily="34" charset="-122"/>
                 <a:cs typeface="Calibri" pitchFamily="34" charset="-120"/>
               </a:rPr>
-              <a:t>Livrables notés (24.08 / 04.09), pas encore commencés</a:t>
+              <a:t>Livrables notés (24.08 / 04.09)</a:t>
             </a:r>
             <a:endParaRPr lang="en-US" sz="1050" dirty="0"/>
           </a:p>
@@ -7525,7 +7525,29 @@
                 <a:ea typeface="Calibri" pitchFamily="34" charset="-122"/>
                 <a:cs typeface="Calibri" pitchFamily="34" charset="-120"/>
               </a:rPr>
-              <a:t>Quelqu'un travaille dessus</a:t>
+              <a:t>Un </a:t>
+            </a:r>
+            <a:r>
+              <a:rPr lang="en-US" sz="1050" dirty="0" err="1">
+                <a:solidFill>
+                  <a:srgbClr val="5B6B7E"/>
+                </a:solidFill>
+                <a:latin typeface="Calibri" pitchFamily="34" charset="0"/>
+                <a:ea typeface="Calibri" pitchFamily="34" charset="-122"/>
+                <a:cs typeface="Calibri" pitchFamily="34" charset="-120"/>
+              </a:rPr>
+              <a:t>binôme</a:t>
+            </a:r>
+            <a:r>
+              <a:rPr lang="en-US" sz="1050" dirty="0">
+                <a:solidFill>
+                  <a:srgbClr val="5B6B7E"/>
+                </a:solidFill>
+                <a:latin typeface="Calibri" pitchFamily="34" charset="0"/>
+                <a:ea typeface="Calibri" pitchFamily="34" charset="-122"/>
+                <a:cs typeface="Calibri" pitchFamily="34" charset="-120"/>
+              </a:rPr>
+              <a:t> travaille dessus</a:t>
             </a:r>
             <a:endParaRPr lang="en-US" sz="1050" dirty="0"/>
           </a:p>
@@ -20254,7 +20276,18 @@
                 <a:ea typeface="Century Schoolbook" pitchFamily="34" charset="-122"/>
                 <a:cs typeface="Century Schoolbook" pitchFamily="34" charset="-120"/>
               </a:rPr>
-              <a:t>Marc</a:t>
+              <a:t>Marc, 40 </a:t>
+            </a:r>
+            <a:r>
+              <a:rPr lang="en-US" sz="1600" b="1" dirty="0" err="1">
+                <a:solidFill>
+                  <a:srgbClr val="16233A"/>
+                </a:solidFill>
+                <a:latin typeface="Century Schoolbook" pitchFamily="34" charset="0"/>
+                <a:ea typeface="Century Schoolbook" pitchFamily="34" charset="-122"/>
+                <a:cs typeface="Century Schoolbook" pitchFamily="34" charset="-120"/>
+              </a:rPr>
+              <a:t>ans</a:t>
             </a:r>
             <a:endParaRPr lang="en-US" sz="1600" dirty="0"/>
           </a:p>
